--- a/visuals/task.pptx
+++ b/visuals/task.pptx
@@ -2,12 +2,13 @@
 <file path=ppt/presentation.xml><?xml version="1.0" encoding="utf-8"?>
 <p:presentation xmlns:a="http://schemas.openxmlformats.org/drawingml/2006/main" xmlns:r="http://schemas.openxmlformats.org/officeDocument/2006/relationships" xmlns:p="http://schemas.openxmlformats.org/presentationml/2006/main" saveSubsetFonts="1" autoCompressPictures="0">
   <p:sldMasterIdLst>
-    <p:sldMasterId id="2147483672" r:id="rId1"/>
+    <p:sldMasterId id="2147483720" r:id="rId1"/>
   </p:sldMasterIdLst>
   <p:sldIdLst>
     <p:sldId id="256" r:id="rId2"/>
+    <p:sldId id="257" r:id="rId3"/>
   </p:sldIdLst>
-  <p:sldSz cx="12192000" cy="5400675"/>
+  <p:sldSz cx="11520488" cy="5400675"/>
   <p:notesSz cx="6858000" cy="9144000"/>
   <p:defaultTextStyle>
     <a:defPPr>
@@ -104,6 +105,11 @@
       </a:defRPr>
     </a:lvl9pPr>
   </p:defaultTextStyle>
+  <p:extLst>
+    <p:ext uri="{EFAFB233-063F-42B5-8137-9DF3F51BA10A}">
+      <p15:sldGuideLst xmlns:p15="http://schemas.microsoft.com/office/powerpoint/2012/main"/>
+    </p:ext>
+  </p:extLst>
 </p:presentation>
 </file>
 
@@ -136,8 +142,8 @@
         </p:nvSpPr>
         <p:spPr>
           <a:xfrm>
-            <a:off x="1524000" y="883861"/>
-            <a:ext cx="9144000" cy="1880235"/>
+            <a:off x="1440061" y="883861"/>
+            <a:ext cx="8640366" cy="1880235"/>
           </a:xfrm>
         </p:spPr>
         <p:txBody>
@@ -168,8 +174,8 @@
         </p:nvSpPr>
         <p:spPr>
           <a:xfrm>
-            <a:off x="1524000" y="2836605"/>
-            <a:ext cx="9144000" cy="1303913"/>
+            <a:off x="1440061" y="2836605"/>
+            <a:ext cx="8640366" cy="1303913"/>
           </a:xfrm>
         </p:spPr>
         <p:txBody>
@@ -289,7 +295,7 @@
     </p:spTree>
     <p:extLst>
       <p:ext uri="{BB962C8B-B14F-4D97-AF65-F5344CB8AC3E}">
-        <p14:creationId xmlns:p14="http://schemas.microsoft.com/office/powerpoint/2010/main" val="1440330134"/>
+        <p14:creationId xmlns:p14="http://schemas.microsoft.com/office/powerpoint/2010/main" val="384916972"/>
       </p:ext>
     </p:extLst>
   </p:cSld>
@@ -459,7 +465,7 @@
     </p:spTree>
     <p:extLst>
       <p:ext uri="{BB962C8B-B14F-4D97-AF65-F5344CB8AC3E}">
-        <p14:creationId xmlns:p14="http://schemas.microsoft.com/office/powerpoint/2010/main" val="2452752364"/>
+        <p14:creationId xmlns:p14="http://schemas.microsoft.com/office/powerpoint/2010/main" val="1591647442"/>
       </p:ext>
     </p:extLst>
   </p:cSld>
@@ -498,8 +504,8 @@
         </p:nvSpPr>
         <p:spPr>
           <a:xfrm>
-            <a:off x="8724900" y="287536"/>
-            <a:ext cx="2628900" cy="4576822"/>
+            <a:off x="8244349" y="287536"/>
+            <a:ext cx="2484105" cy="4576822"/>
           </a:xfrm>
         </p:spPr>
         <p:txBody>
@@ -526,8 +532,8 @@
         </p:nvSpPr>
         <p:spPr>
           <a:xfrm>
-            <a:off x="838200" y="287536"/>
-            <a:ext cx="7734300" cy="4576822"/>
+            <a:off x="792033" y="287536"/>
+            <a:ext cx="7308310" cy="4576822"/>
           </a:xfrm>
         </p:spPr>
         <p:txBody>
@@ -639,7 +645,7 @@
     </p:spTree>
     <p:extLst>
       <p:ext uri="{BB962C8B-B14F-4D97-AF65-F5344CB8AC3E}">
-        <p14:creationId xmlns:p14="http://schemas.microsoft.com/office/powerpoint/2010/main" val="45229045"/>
+        <p14:creationId xmlns:p14="http://schemas.microsoft.com/office/powerpoint/2010/main" val="3878510997"/>
       </p:ext>
     </p:extLst>
   </p:cSld>
@@ -809,7 +815,7 @@
     </p:spTree>
     <p:extLst>
       <p:ext uri="{BB962C8B-B14F-4D97-AF65-F5344CB8AC3E}">
-        <p14:creationId xmlns:p14="http://schemas.microsoft.com/office/powerpoint/2010/main" val="1895623325"/>
+        <p14:creationId xmlns:p14="http://schemas.microsoft.com/office/powerpoint/2010/main" val="4214341054"/>
       </p:ext>
     </p:extLst>
   </p:cSld>
@@ -848,8 +854,8 @@
         </p:nvSpPr>
         <p:spPr>
           <a:xfrm>
-            <a:off x="831850" y="1346419"/>
-            <a:ext cx="10515600" cy="2246530"/>
+            <a:off x="786033" y="1346419"/>
+            <a:ext cx="9936421" cy="2246530"/>
           </a:xfrm>
         </p:spPr>
         <p:txBody>
@@ -880,8 +886,8 @@
         </p:nvSpPr>
         <p:spPr>
           <a:xfrm>
-            <a:off x="831850" y="3614203"/>
-            <a:ext cx="10515600" cy="1181397"/>
+            <a:off x="786033" y="3614203"/>
+            <a:ext cx="9936421" cy="1181397"/>
           </a:xfrm>
         </p:spPr>
         <p:txBody>
@@ -1055,7 +1061,7 @@
     </p:spTree>
     <p:extLst>
       <p:ext uri="{BB962C8B-B14F-4D97-AF65-F5344CB8AC3E}">
-        <p14:creationId xmlns:p14="http://schemas.microsoft.com/office/powerpoint/2010/main" val="3842201694"/>
+        <p14:creationId xmlns:p14="http://schemas.microsoft.com/office/powerpoint/2010/main" val="407845098"/>
       </p:ext>
     </p:extLst>
   </p:cSld>
@@ -1117,8 +1123,8 @@
         </p:nvSpPr>
         <p:spPr>
           <a:xfrm>
-            <a:off x="838200" y="1437680"/>
-            <a:ext cx="5181600" cy="3426679"/>
+            <a:off x="792034" y="1437680"/>
+            <a:ext cx="4896207" cy="3426679"/>
           </a:xfrm>
         </p:spPr>
         <p:txBody>
@@ -1174,8 +1180,8 @@
         </p:nvSpPr>
         <p:spPr>
           <a:xfrm>
-            <a:off x="6172200" y="1437680"/>
-            <a:ext cx="5181600" cy="3426679"/>
+            <a:off x="5832247" y="1437680"/>
+            <a:ext cx="4896207" cy="3426679"/>
           </a:xfrm>
         </p:spPr>
         <p:txBody>
@@ -1287,7 +1293,7 @@
     </p:spTree>
     <p:extLst>
       <p:ext uri="{BB962C8B-B14F-4D97-AF65-F5344CB8AC3E}">
-        <p14:creationId xmlns:p14="http://schemas.microsoft.com/office/powerpoint/2010/main" val="1191564314"/>
+        <p14:creationId xmlns:p14="http://schemas.microsoft.com/office/powerpoint/2010/main" val="3034913971"/>
       </p:ext>
     </p:extLst>
   </p:cSld>
@@ -1326,8 +1332,8 @@
         </p:nvSpPr>
         <p:spPr>
           <a:xfrm>
-            <a:off x="839788" y="287536"/>
-            <a:ext cx="10515600" cy="1043881"/>
+            <a:off x="793534" y="287536"/>
+            <a:ext cx="9936421" cy="1043881"/>
           </a:xfrm>
         </p:spPr>
         <p:txBody>
@@ -1354,8 +1360,8 @@
         </p:nvSpPr>
         <p:spPr>
           <a:xfrm>
-            <a:off x="839789" y="1323916"/>
-            <a:ext cx="5157787" cy="648831"/>
+            <a:off x="793535" y="1323916"/>
+            <a:ext cx="4873706" cy="648831"/>
           </a:xfrm>
         </p:spPr>
         <p:txBody>
@@ -1419,8 +1425,8 @@
         </p:nvSpPr>
         <p:spPr>
           <a:xfrm>
-            <a:off x="839789" y="1972747"/>
-            <a:ext cx="5157787" cy="2901613"/>
+            <a:off x="793535" y="1972747"/>
+            <a:ext cx="4873706" cy="2901613"/>
           </a:xfrm>
         </p:spPr>
         <p:txBody>
@@ -1476,8 +1482,8 @@
         </p:nvSpPr>
         <p:spPr>
           <a:xfrm>
-            <a:off x="6172200" y="1323916"/>
-            <a:ext cx="5183188" cy="648831"/>
+            <a:off x="5832247" y="1323916"/>
+            <a:ext cx="4897708" cy="648831"/>
           </a:xfrm>
         </p:spPr>
         <p:txBody>
@@ -1541,8 +1547,8 @@
         </p:nvSpPr>
         <p:spPr>
           <a:xfrm>
-            <a:off x="6172200" y="1972747"/>
-            <a:ext cx="5183188" cy="2901613"/>
+            <a:off x="5832247" y="1972747"/>
+            <a:ext cx="4897708" cy="2901613"/>
           </a:xfrm>
         </p:spPr>
         <p:txBody>
@@ -1654,7 +1660,7 @@
     </p:spTree>
     <p:extLst>
       <p:ext uri="{BB962C8B-B14F-4D97-AF65-F5344CB8AC3E}">
-        <p14:creationId xmlns:p14="http://schemas.microsoft.com/office/powerpoint/2010/main" val="3224160498"/>
+        <p14:creationId xmlns:p14="http://schemas.microsoft.com/office/powerpoint/2010/main" val="1029828567"/>
       </p:ext>
     </p:extLst>
   </p:cSld>
@@ -1772,7 +1778,7 @@
     </p:spTree>
     <p:extLst>
       <p:ext uri="{BB962C8B-B14F-4D97-AF65-F5344CB8AC3E}">
-        <p14:creationId xmlns:p14="http://schemas.microsoft.com/office/powerpoint/2010/main" val="2454597408"/>
+        <p14:creationId xmlns:p14="http://schemas.microsoft.com/office/powerpoint/2010/main" val="3259542233"/>
       </p:ext>
     </p:extLst>
   </p:cSld>
@@ -1867,7 +1873,7 @@
     </p:spTree>
     <p:extLst>
       <p:ext uri="{BB962C8B-B14F-4D97-AF65-F5344CB8AC3E}">
-        <p14:creationId xmlns:p14="http://schemas.microsoft.com/office/powerpoint/2010/main" val="3450489542"/>
+        <p14:creationId xmlns:p14="http://schemas.microsoft.com/office/powerpoint/2010/main" val="3192056677"/>
       </p:ext>
     </p:extLst>
   </p:cSld>
@@ -1906,8 +1912,8 @@
         </p:nvSpPr>
         <p:spPr>
           <a:xfrm>
-            <a:off x="839789" y="360045"/>
-            <a:ext cx="3932237" cy="1260158"/>
+            <a:off x="793535" y="360045"/>
+            <a:ext cx="3715657" cy="1260158"/>
           </a:xfrm>
         </p:spPr>
         <p:txBody>
@@ -1938,8 +1944,8 @@
         </p:nvSpPr>
         <p:spPr>
           <a:xfrm>
-            <a:off x="5183188" y="777597"/>
-            <a:ext cx="6172200" cy="3837980"/>
+            <a:off x="4897708" y="777597"/>
+            <a:ext cx="5832247" cy="3837980"/>
           </a:xfrm>
         </p:spPr>
         <p:txBody>
@@ -2023,8 +2029,8 @@
         </p:nvSpPr>
         <p:spPr>
           <a:xfrm>
-            <a:off x="839789" y="1620202"/>
-            <a:ext cx="3932237" cy="3001626"/>
+            <a:off x="793535" y="1620202"/>
+            <a:ext cx="3715657" cy="3001626"/>
           </a:xfrm>
         </p:spPr>
         <p:txBody>
@@ -2144,7 +2150,7 @@
     </p:spTree>
     <p:extLst>
       <p:ext uri="{BB962C8B-B14F-4D97-AF65-F5344CB8AC3E}">
-        <p14:creationId xmlns:p14="http://schemas.microsoft.com/office/powerpoint/2010/main" val="4151702972"/>
+        <p14:creationId xmlns:p14="http://schemas.microsoft.com/office/powerpoint/2010/main" val="709817186"/>
       </p:ext>
     </p:extLst>
   </p:cSld>
@@ -2183,8 +2189,8 @@
         </p:nvSpPr>
         <p:spPr>
           <a:xfrm>
-            <a:off x="839789" y="360045"/>
-            <a:ext cx="3932237" cy="1260158"/>
+            <a:off x="793535" y="360045"/>
+            <a:ext cx="3715657" cy="1260158"/>
           </a:xfrm>
         </p:spPr>
         <p:txBody>
@@ -2215,8 +2221,8 @@
         </p:nvSpPr>
         <p:spPr>
           <a:xfrm>
-            <a:off x="5183188" y="777597"/>
-            <a:ext cx="6172200" cy="3837980"/>
+            <a:off x="4897708" y="777597"/>
+            <a:ext cx="5832247" cy="3837980"/>
           </a:xfrm>
         </p:spPr>
         <p:txBody>
@@ -2280,8 +2286,8 @@
         </p:nvSpPr>
         <p:spPr>
           <a:xfrm>
-            <a:off x="839789" y="1620202"/>
-            <a:ext cx="3932237" cy="3001626"/>
+            <a:off x="793535" y="1620202"/>
+            <a:ext cx="3715657" cy="3001626"/>
           </a:xfrm>
         </p:spPr>
         <p:txBody>
@@ -2401,7 +2407,7 @@
     </p:spTree>
     <p:extLst>
       <p:ext uri="{BB962C8B-B14F-4D97-AF65-F5344CB8AC3E}">
-        <p14:creationId xmlns:p14="http://schemas.microsoft.com/office/powerpoint/2010/main" val="1155483784"/>
+        <p14:creationId xmlns:p14="http://schemas.microsoft.com/office/powerpoint/2010/main" val="3869882404"/>
       </p:ext>
     </p:extLst>
   </p:cSld>
@@ -2445,8 +2451,8 @@
         </p:nvSpPr>
         <p:spPr>
           <a:xfrm>
-            <a:off x="838200" y="287536"/>
-            <a:ext cx="10515600" cy="1043881"/>
+            <a:off x="792034" y="287536"/>
+            <a:ext cx="9936421" cy="1043881"/>
           </a:xfrm>
           <a:prstGeom prst="rect">
             <a:avLst/>
@@ -2478,8 +2484,8 @@
         </p:nvSpPr>
         <p:spPr>
           <a:xfrm>
-            <a:off x="838200" y="1437680"/>
-            <a:ext cx="10515600" cy="3426679"/>
+            <a:off x="792034" y="1437680"/>
+            <a:ext cx="9936421" cy="3426679"/>
           </a:xfrm>
           <a:prstGeom prst="rect">
             <a:avLst/>
@@ -2540,8 +2546,8 @@
         </p:nvSpPr>
         <p:spPr>
           <a:xfrm>
-            <a:off x="838200" y="5005626"/>
-            <a:ext cx="2743200" cy="287536"/>
+            <a:off x="792033" y="5005626"/>
+            <a:ext cx="2592110" cy="287536"/>
           </a:xfrm>
           <a:prstGeom prst="rect">
             <a:avLst/>
@@ -2581,8 +2587,8 @@
         </p:nvSpPr>
         <p:spPr>
           <a:xfrm>
-            <a:off x="4038600" y="5005626"/>
-            <a:ext cx="4114800" cy="287536"/>
+            <a:off x="3816162" y="5005626"/>
+            <a:ext cx="3888165" cy="287536"/>
           </a:xfrm>
           <a:prstGeom prst="rect">
             <a:avLst/>
@@ -2618,8 +2624,8 @@
         </p:nvSpPr>
         <p:spPr>
           <a:xfrm>
-            <a:off x="8610600" y="5005626"/>
-            <a:ext cx="2743200" cy="287536"/>
+            <a:off x="8136345" y="5005626"/>
+            <a:ext cx="2592110" cy="287536"/>
           </a:xfrm>
           <a:prstGeom prst="rect">
             <a:avLst/>
@@ -2650,23 +2656,23 @@
     </p:spTree>
     <p:extLst>
       <p:ext uri="{BB962C8B-B14F-4D97-AF65-F5344CB8AC3E}">
-        <p14:creationId xmlns:p14="http://schemas.microsoft.com/office/powerpoint/2010/main" val="3988152820"/>
+        <p14:creationId xmlns:p14="http://schemas.microsoft.com/office/powerpoint/2010/main" val="1739274713"/>
       </p:ext>
     </p:extLst>
   </p:cSld>
   <p:clrMap bg1="lt1" tx1="dk1" bg2="lt2" tx2="dk2" accent1="accent1" accent2="accent2" accent3="accent3" accent4="accent4" accent5="accent5" accent6="accent6" hlink="hlink" folHlink="folHlink"/>
   <p:sldLayoutIdLst>
-    <p:sldLayoutId id="2147483673" r:id="rId1"/>
-    <p:sldLayoutId id="2147483674" r:id="rId2"/>
-    <p:sldLayoutId id="2147483675" r:id="rId3"/>
-    <p:sldLayoutId id="2147483676" r:id="rId4"/>
-    <p:sldLayoutId id="2147483677" r:id="rId5"/>
-    <p:sldLayoutId id="2147483678" r:id="rId6"/>
-    <p:sldLayoutId id="2147483679" r:id="rId7"/>
-    <p:sldLayoutId id="2147483680" r:id="rId8"/>
-    <p:sldLayoutId id="2147483681" r:id="rId9"/>
-    <p:sldLayoutId id="2147483682" r:id="rId10"/>
-    <p:sldLayoutId id="2147483683" r:id="rId11"/>
+    <p:sldLayoutId id="2147483721" r:id="rId1"/>
+    <p:sldLayoutId id="2147483722" r:id="rId2"/>
+    <p:sldLayoutId id="2147483723" r:id="rId3"/>
+    <p:sldLayoutId id="2147483724" r:id="rId4"/>
+    <p:sldLayoutId id="2147483725" r:id="rId5"/>
+    <p:sldLayoutId id="2147483726" r:id="rId6"/>
+    <p:sldLayoutId id="2147483727" r:id="rId7"/>
+    <p:sldLayoutId id="2147483728" r:id="rId8"/>
+    <p:sldLayoutId id="2147483729" r:id="rId9"/>
+    <p:sldLayoutId id="2147483730" r:id="rId10"/>
+    <p:sldLayoutId id="2147483731" r:id="rId11"/>
   </p:sldLayoutIdLst>
   <p:txStyles>
     <p:titleStyle>
@@ -2982,8 +2988,8 @@
         </p:nvSpPr>
         <p:spPr>
           <a:xfrm>
-            <a:off x="88485" y="3257144"/>
-            <a:ext cx="3647522" cy="1295098"/>
+            <a:off x="-10844" y="3257144"/>
+            <a:ext cx="3411095" cy="1295098"/>
           </a:xfrm>
           <a:prstGeom prst="rect">
             <a:avLst/>
@@ -3034,8 +3040,8 @@
         </p:nvSpPr>
         <p:spPr>
           <a:xfrm>
-            <a:off x="88485" y="668542"/>
-            <a:ext cx="3647522" cy="1295098"/>
+            <a:off x="-10843" y="668542"/>
+            <a:ext cx="3411094" cy="1295098"/>
           </a:xfrm>
           <a:prstGeom prst="rect">
             <a:avLst/>
@@ -3086,8 +3092,8 @@
         </p:nvSpPr>
         <p:spPr>
           <a:xfrm>
-            <a:off x="8449923" y="3257144"/>
-            <a:ext cx="3647522" cy="1295098"/>
+            <a:off x="8114167" y="3257144"/>
+            <a:ext cx="3411094" cy="1295098"/>
           </a:xfrm>
           <a:prstGeom prst="rect">
             <a:avLst/>
@@ -3138,8 +3144,8 @@
         </p:nvSpPr>
         <p:spPr>
           <a:xfrm>
-            <a:off x="8449923" y="669871"/>
-            <a:ext cx="3647522" cy="1295098"/>
+            <a:off x="8114167" y="669871"/>
+            <a:ext cx="3411094" cy="1295098"/>
           </a:xfrm>
           <a:prstGeom prst="rect">
             <a:avLst/>
@@ -3199,7 +3205,7 @@
         </p:blipFill>
         <p:spPr>
           <a:xfrm>
-            <a:off x="3483932" y="34595"/>
+            <a:off x="3148180" y="34599"/>
             <a:ext cx="5224141" cy="5328745"/>
           </a:xfrm>
           <a:prstGeom prst="rect">
@@ -3221,7 +3227,7 @@
         </p:nvSpPr>
         <p:spPr>
           <a:xfrm>
-            <a:off x="9673729" y="669871"/>
+            <a:off x="9337977" y="669871"/>
             <a:ext cx="1654619" cy="1295098"/>
           </a:xfrm>
           <a:prstGeom prst="rect">
@@ -3316,8 +3322,8 @@
         </p:nvSpPr>
         <p:spPr>
           <a:xfrm>
-            <a:off x="340942" y="668542"/>
-            <a:ext cx="2890535" cy="1295098"/>
+            <a:off x="-10843" y="668542"/>
+            <a:ext cx="2922596" cy="1295098"/>
           </a:xfrm>
           <a:prstGeom prst="rect">
             <a:avLst/>
@@ -3392,25 +3398,7 @@
                 </a:solidFill>
                 <a:latin typeface="Merriweather" pitchFamily="2" charset="77"/>
               </a:rPr>
-              <a:t>(</a:t>
-            </a:r>
-            <a:r>
-              <a:rPr lang="en-US">
-                <a:solidFill>
-                  <a:srgbClr val="0A0A0A"/>
-                </a:solidFill>
-                <a:latin typeface="Merriweather" pitchFamily="2" charset="77"/>
-              </a:rPr>
-              <a:t>to lose</a:t>
-            </a:r>
-            <a:r>
-              <a:rPr lang="en-US" dirty="0">
-                <a:solidFill>
-                  <a:srgbClr val="0A0A0A"/>
-                </a:solidFill>
-                <a:latin typeface="Merriweather" pitchFamily="2" charset="77"/>
-              </a:rPr>
-              <a:t>)</a:t>
+              <a:t>(to lose)</a:t>
             </a:r>
           </a:p>
         </p:txBody>
@@ -3429,7 +3417,7 @@
         </p:nvSpPr>
         <p:spPr>
           <a:xfrm>
-            <a:off x="532498" y="3257144"/>
+            <a:off x="196742" y="3257144"/>
             <a:ext cx="2507418" cy="1295098"/>
           </a:xfrm>
           <a:prstGeom prst="rect">
@@ -3524,7 +3512,7 @@
         </p:nvSpPr>
         <p:spPr>
           <a:xfrm>
-            <a:off x="9264960" y="3257144"/>
+            <a:off x="8929204" y="3257144"/>
             <a:ext cx="2472152" cy="1295098"/>
           </a:xfrm>
           <a:prstGeom prst="rect">
@@ -3609,6 +3597,682 @@
     <p:extLst>
       <p:ext uri="{BB962C8B-B14F-4D97-AF65-F5344CB8AC3E}">
         <p14:creationId xmlns:p14="http://schemas.microsoft.com/office/powerpoint/2010/main" val="3582771618"/>
+      </p:ext>
+    </p:extLst>
+  </p:cSld>
+  <p:clrMapOvr>
+    <a:masterClrMapping/>
+  </p:clrMapOvr>
+</p:sld>
+</file>
+
+<file path=ppt/slides/slide2.xml><?xml version="1.0" encoding="utf-8"?>
+<p:sld xmlns:a="http://schemas.openxmlformats.org/drawingml/2006/main" xmlns:r="http://schemas.openxmlformats.org/officeDocument/2006/relationships" xmlns:p="http://schemas.openxmlformats.org/presentationml/2006/main">
+  <p:cSld>
+    <p:spTree>
+      <p:nvGrpSpPr>
+        <p:cNvPr id="1" name="">
+          <a:extLst>
+            <a:ext uri="{FF2B5EF4-FFF2-40B4-BE49-F238E27FC236}">
+              <a16:creationId xmlns:a16="http://schemas.microsoft.com/office/drawing/2014/main" id="{742F70EC-F733-B5E7-339F-7E8166FC1579}"/>
+            </a:ext>
+          </a:extLst>
+        </p:cNvPr>
+        <p:cNvGrpSpPr/>
+        <p:nvPr/>
+      </p:nvGrpSpPr>
+      <p:grpSpPr>
+        <a:xfrm>
+          <a:off x="0" y="0"/>
+          <a:ext cx="0" cy="0"/>
+          <a:chOff x="0" y="0"/>
+          <a:chExt cx="0" cy="0"/>
+        </a:xfrm>
+      </p:grpSpPr>
+      <p:grpSp>
+        <p:nvGrpSpPr>
+          <p:cNvPr id="10" name="Gruppieren 9">
+            <a:extLst>
+              <a:ext uri="{FF2B5EF4-FFF2-40B4-BE49-F238E27FC236}">
+                <a16:creationId xmlns:a16="http://schemas.microsoft.com/office/drawing/2014/main" id="{01E0C337-C265-2D12-CE3E-7564F06F9DBB}"/>
+              </a:ext>
+            </a:extLst>
+          </p:cNvPr>
+          <p:cNvGrpSpPr/>
+          <p:nvPr/>
+        </p:nvGrpSpPr>
+        <p:grpSpPr>
+          <a:xfrm>
+            <a:off x="3148180" y="-1260502"/>
+            <a:ext cx="5224141" cy="7918941"/>
+            <a:chOff x="3483933" y="538930"/>
+            <a:chExt cx="5224141" cy="7918941"/>
+          </a:xfrm>
+        </p:grpSpPr>
+        <p:sp>
+          <p:nvSpPr>
+            <p:cNvPr id="2" name="Rechteck 1">
+              <a:extLst>
+                <a:ext uri="{FF2B5EF4-FFF2-40B4-BE49-F238E27FC236}">
+                  <a16:creationId xmlns:a16="http://schemas.microsoft.com/office/drawing/2014/main" id="{CC838A8B-D449-0F46-C61D-C08D0CB60448}"/>
+                </a:ext>
+              </a:extLst>
+            </p:cNvPr>
+            <p:cNvSpPr/>
+            <p:nvPr/>
+          </p:nvSpPr>
+          <p:spPr>
+            <a:xfrm>
+              <a:off x="6316380" y="538930"/>
+              <a:ext cx="2180518" cy="1295098"/>
+            </a:xfrm>
+            <a:prstGeom prst="rect">
+              <a:avLst/>
+            </a:prstGeom>
+            <a:solidFill>
+              <a:srgbClr val="FBF5E7"/>
+            </a:solidFill>
+            <a:ln>
+              <a:noFill/>
+            </a:ln>
+          </p:spPr>
+          <p:style>
+            <a:lnRef idx="2">
+              <a:schemeClr val="accent1">
+                <a:shade val="15000"/>
+              </a:schemeClr>
+            </a:lnRef>
+            <a:fillRef idx="1">
+              <a:schemeClr val="accent1"/>
+            </a:fillRef>
+            <a:effectRef idx="0">
+              <a:schemeClr val="accent1"/>
+            </a:effectRef>
+            <a:fontRef idx="minor">
+              <a:schemeClr val="lt1"/>
+            </a:fontRef>
+          </p:style>
+          <p:txBody>
+            <a:bodyPr rtlCol="0" anchor="ctr"/>
+            <a:lstStyle/>
+            <a:p>
+              <a:pPr algn="ctr"/>
+              <a:endParaRPr lang="en-US"/>
+            </a:p>
+          </p:txBody>
+        </p:sp>
+        <p:sp>
+          <p:nvSpPr>
+            <p:cNvPr id="3" name="Rechteck 2">
+              <a:extLst>
+                <a:ext uri="{FF2B5EF4-FFF2-40B4-BE49-F238E27FC236}">
+                  <a16:creationId xmlns:a16="http://schemas.microsoft.com/office/drawing/2014/main" id="{229332D2-5168-515E-715F-51DB20E934B6}"/>
+                </a:ext>
+              </a:extLst>
+            </p:cNvPr>
+            <p:cNvSpPr/>
+            <p:nvPr/>
+          </p:nvSpPr>
+          <p:spPr>
+            <a:xfrm>
+              <a:off x="3631842" y="7162773"/>
+              <a:ext cx="2180518" cy="1295098"/>
+            </a:xfrm>
+            <a:prstGeom prst="rect">
+              <a:avLst/>
+            </a:prstGeom>
+            <a:solidFill>
+              <a:srgbClr val="FBF5E7"/>
+            </a:solidFill>
+            <a:ln>
+              <a:noFill/>
+            </a:ln>
+          </p:spPr>
+          <p:style>
+            <a:lnRef idx="2">
+              <a:schemeClr val="accent1">
+                <a:shade val="15000"/>
+              </a:schemeClr>
+            </a:lnRef>
+            <a:fillRef idx="1">
+              <a:schemeClr val="accent1"/>
+            </a:fillRef>
+            <a:effectRef idx="0">
+              <a:schemeClr val="accent1"/>
+            </a:effectRef>
+            <a:fontRef idx="minor">
+              <a:schemeClr val="lt1"/>
+            </a:fontRef>
+          </p:style>
+          <p:txBody>
+            <a:bodyPr rtlCol="0" anchor="ctr"/>
+            <a:lstStyle/>
+            <a:p>
+              <a:pPr algn="ctr"/>
+              <a:endParaRPr lang="en-US"/>
+            </a:p>
+          </p:txBody>
+        </p:sp>
+        <p:sp>
+          <p:nvSpPr>
+            <p:cNvPr id="9" name="Rechteck 8">
+              <a:extLst>
+                <a:ext uri="{FF2B5EF4-FFF2-40B4-BE49-F238E27FC236}">
+                  <a16:creationId xmlns:a16="http://schemas.microsoft.com/office/drawing/2014/main" id="{90CA9243-CE7E-8183-3E78-7799128BCCFA}"/>
+                </a:ext>
+              </a:extLst>
+            </p:cNvPr>
+            <p:cNvSpPr/>
+            <p:nvPr/>
+          </p:nvSpPr>
+          <p:spPr>
+            <a:xfrm>
+              <a:off x="6316380" y="7150499"/>
+              <a:ext cx="2180518" cy="1295098"/>
+            </a:xfrm>
+            <a:prstGeom prst="rect">
+              <a:avLst/>
+            </a:prstGeom>
+            <a:solidFill>
+              <a:srgbClr val="FBF5E7"/>
+            </a:solidFill>
+            <a:ln>
+              <a:noFill/>
+            </a:ln>
+          </p:spPr>
+          <p:style>
+            <a:lnRef idx="2">
+              <a:schemeClr val="accent1">
+                <a:shade val="15000"/>
+              </a:schemeClr>
+            </a:lnRef>
+            <a:fillRef idx="1">
+              <a:schemeClr val="accent1"/>
+            </a:fillRef>
+            <a:effectRef idx="0">
+              <a:schemeClr val="accent1"/>
+            </a:effectRef>
+            <a:fontRef idx="minor">
+              <a:schemeClr val="lt1"/>
+            </a:fontRef>
+          </p:style>
+          <p:txBody>
+            <a:bodyPr rtlCol="0" anchor="ctr"/>
+            <a:lstStyle/>
+            <a:p>
+              <a:pPr algn="ctr"/>
+              <a:endParaRPr lang="en-US"/>
+            </a:p>
+          </p:txBody>
+        </p:sp>
+        <p:sp>
+          <p:nvSpPr>
+            <p:cNvPr id="12" name="Rechteck 11">
+              <a:extLst>
+                <a:ext uri="{FF2B5EF4-FFF2-40B4-BE49-F238E27FC236}">
+                  <a16:creationId xmlns:a16="http://schemas.microsoft.com/office/drawing/2014/main" id="{FB1E27CF-2EAE-99F1-75D3-911A84850479}"/>
+                </a:ext>
+              </a:extLst>
+            </p:cNvPr>
+            <p:cNvSpPr/>
+            <p:nvPr/>
+          </p:nvSpPr>
+          <p:spPr>
+            <a:xfrm>
+              <a:off x="3631842" y="538930"/>
+              <a:ext cx="2180518" cy="1295098"/>
+            </a:xfrm>
+            <a:prstGeom prst="rect">
+              <a:avLst/>
+            </a:prstGeom>
+            <a:solidFill>
+              <a:srgbClr val="FBF5E7"/>
+            </a:solidFill>
+            <a:ln>
+              <a:noFill/>
+            </a:ln>
+          </p:spPr>
+          <p:style>
+            <a:lnRef idx="2">
+              <a:schemeClr val="accent1">
+                <a:shade val="15000"/>
+              </a:schemeClr>
+            </a:lnRef>
+            <a:fillRef idx="1">
+              <a:schemeClr val="accent1"/>
+            </a:fillRef>
+            <a:effectRef idx="0">
+              <a:schemeClr val="accent1"/>
+            </a:effectRef>
+            <a:fontRef idx="minor">
+              <a:schemeClr val="lt1"/>
+            </a:fontRef>
+          </p:style>
+          <p:txBody>
+            <a:bodyPr rtlCol="0" anchor="ctr"/>
+            <a:lstStyle/>
+            <a:p>
+              <a:pPr algn="ctr"/>
+              <a:endParaRPr lang="en-US"/>
+            </a:p>
+          </p:txBody>
+        </p:sp>
+        <p:pic>
+          <p:nvPicPr>
+            <p:cNvPr id="4" name="Grafik 3">
+              <a:extLst>
+                <a:ext uri="{FF2B5EF4-FFF2-40B4-BE49-F238E27FC236}">
+                  <a16:creationId xmlns:a16="http://schemas.microsoft.com/office/drawing/2014/main" id="{CF33CE58-967A-E62A-94C3-F928AC977CCD}"/>
+                </a:ext>
+              </a:extLst>
+            </p:cNvPr>
+            <p:cNvPicPr>
+              <a:picLocks noChangeAspect="1"/>
+            </p:cNvPicPr>
+            <p:nvPr/>
+          </p:nvPicPr>
+          <p:blipFill>
+            <a:blip r:embed="rId2"/>
+            <a:srcRect b="22299"/>
+            <a:stretch>
+              <a:fillRect/>
+            </a:stretch>
+          </p:blipFill>
+          <p:spPr>
+            <a:xfrm>
+              <a:off x="3483933" y="1834028"/>
+              <a:ext cx="5224141" cy="5328745"/>
+            </a:xfrm>
+            <a:prstGeom prst="rect">
+              <a:avLst/>
+            </a:prstGeom>
+          </p:spPr>
+        </p:pic>
+        <p:sp>
+          <p:nvSpPr>
+            <p:cNvPr id="5" name="Textfeld 4">
+              <a:extLst>
+                <a:ext uri="{FF2B5EF4-FFF2-40B4-BE49-F238E27FC236}">
+                  <a16:creationId xmlns:a16="http://schemas.microsoft.com/office/drawing/2014/main" id="{43FFB5A5-577F-4ED7-FA9E-32474461297E}"/>
+                </a:ext>
+              </a:extLst>
+            </p:cNvPr>
+            <p:cNvSpPr txBox="1"/>
+            <p:nvPr/>
+          </p:nvSpPr>
+          <p:spPr>
+            <a:xfrm>
+              <a:off x="6744439" y="672588"/>
+              <a:ext cx="1324401" cy="1027782"/>
+            </a:xfrm>
+            <a:prstGeom prst="rect">
+              <a:avLst/>
+            </a:prstGeom>
+            <a:noFill/>
+          </p:spPr>
+          <p:txBody>
+            <a:bodyPr wrap="none" rtlCol="0">
+              <a:spAutoFit/>
+            </a:bodyPr>
+            <a:lstStyle/>
+            <a:p>
+              <a:pPr algn="ctr">
+                <a:lnSpc>
+                  <a:spcPct val="150000"/>
+                </a:lnSpc>
+              </a:pPr>
+              <a:r>
+                <a:rPr lang="en-US" sz="1400" b="1" dirty="0">
+                  <a:solidFill>
+                    <a:srgbClr val="0A0A0A"/>
+                  </a:solidFill>
+                  <a:latin typeface="Merriweather" pitchFamily="2" charset="77"/>
+                </a:rPr>
+                <a:t>Target word</a:t>
+              </a:r>
+            </a:p>
+            <a:p>
+              <a:pPr algn="ctr">
+                <a:lnSpc>
+                  <a:spcPct val="150000"/>
+                </a:lnSpc>
+              </a:pPr>
+              <a:r>
+                <a:rPr lang="en-US" sz="1400" dirty="0">
+                  <a:solidFill>
+                    <a:srgbClr val="0A0A0A"/>
+                  </a:solidFill>
+                  <a:latin typeface="Merriweather" pitchFamily="2" charset="77"/>
+                </a:rPr>
+                <a:t>”</a:t>
+              </a:r>
+              <a:r>
+                <a:rPr lang="en-US" sz="1400" dirty="0" err="1">
+                  <a:solidFill>
+                    <a:srgbClr val="0A0A0A"/>
+                  </a:solidFill>
+                  <a:latin typeface="Merriweather" pitchFamily="2" charset="77"/>
+                </a:rPr>
+                <a:t>jonglieren</a:t>
+              </a:r>
+              <a:r>
+                <a:rPr lang="en-US" sz="1400" dirty="0">
+                  <a:solidFill>
+                    <a:srgbClr val="0A0A0A"/>
+                  </a:solidFill>
+                  <a:latin typeface="Merriweather" pitchFamily="2" charset="77"/>
+                </a:rPr>
+                <a:t>”</a:t>
+              </a:r>
+            </a:p>
+            <a:p>
+              <a:pPr algn="ctr">
+                <a:lnSpc>
+                  <a:spcPct val="150000"/>
+                </a:lnSpc>
+              </a:pPr>
+              <a:r>
+                <a:rPr lang="en-US" sz="1400" dirty="0">
+                  <a:solidFill>
+                    <a:srgbClr val="0A0A0A"/>
+                  </a:solidFill>
+                  <a:latin typeface="Merriweather" pitchFamily="2" charset="77"/>
+                </a:rPr>
+                <a:t>(to juggle)</a:t>
+              </a:r>
+            </a:p>
+          </p:txBody>
+        </p:sp>
+        <p:sp>
+          <p:nvSpPr>
+            <p:cNvPr id="6" name="Textfeld 5">
+              <a:extLst>
+                <a:ext uri="{FF2B5EF4-FFF2-40B4-BE49-F238E27FC236}">
+                  <a16:creationId xmlns:a16="http://schemas.microsoft.com/office/drawing/2014/main" id="{8375679E-755C-6133-4BA3-62F1A5FD7E79}"/>
+                </a:ext>
+              </a:extLst>
+            </p:cNvPr>
+            <p:cNvSpPr txBox="1"/>
+            <p:nvPr/>
+          </p:nvSpPr>
+          <p:spPr>
+            <a:xfrm>
+              <a:off x="3568580" y="672588"/>
+              <a:ext cx="2307042" cy="1027782"/>
+            </a:xfrm>
+            <a:prstGeom prst="rect">
+              <a:avLst/>
+            </a:prstGeom>
+            <a:noFill/>
+          </p:spPr>
+          <p:txBody>
+            <a:bodyPr wrap="none" rtlCol="0">
+              <a:spAutoFit/>
+            </a:bodyPr>
+            <a:lstStyle/>
+            <a:p>
+              <a:pPr algn="ctr">
+                <a:lnSpc>
+                  <a:spcPct val="150000"/>
+                </a:lnSpc>
+              </a:pPr>
+              <a:r>
+                <a:rPr lang="en-US" sz="1400" b="1" dirty="0">
+                  <a:solidFill>
+                    <a:srgbClr val="0A0A0A"/>
+                  </a:solidFill>
+                  <a:latin typeface="Merriweather" pitchFamily="2" charset="77"/>
+                </a:rPr>
+                <a:t>Phonological distractor</a:t>
+              </a:r>
+            </a:p>
+            <a:p>
+              <a:pPr algn="ctr">
+                <a:lnSpc>
+                  <a:spcPct val="150000"/>
+                </a:lnSpc>
+              </a:pPr>
+              <a:r>
+                <a:rPr lang="en-US" sz="1400" dirty="0">
+                  <a:solidFill>
+                    <a:srgbClr val="0A0A0A"/>
+                  </a:solidFill>
+                  <a:latin typeface="Merriweather" pitchFamily="2" charset="77"/>
+                </a:rPr>
+                <a:t>”</a:t>
+              </a:r>
+              <a:r>
+                <a:rPr lang="en-US" sz="1400" dirty="0" err="1">
+                  <a:solidFill>
+                    <a:srgbClr val="0A0A0A"/>
+                  </a:solidFill>
+                  <a:latin typeface="Merriweather" pitchFamily="2" charset="77"/>
+                </a:rPr>
+                <a:t>verlieren</a:t>
+              </a:r>
+              <a:r>
+                <a:rPr lang="en-US" sz="1400" dirty="0">
+                  <a:solidFill>
+                    <a:srgbClr val="0A0A0A"/>
+                  </a:solidFill>
+                  <a:latin typeface="Merriweather" pitchFamily="2" charset="77"/>
+                </a:rPr>
+                <a:t>”</a:t>
+              </a:r>
+            </a:p>
+            <a:p>
+              <a:pPr algn="ctr">
+                <a:lnSpc>
+                  <a:spcPct val="150000"/>
+                </a:lnSpc>
+              </a:pPr>
+              <a:r>
+                <a:rPr lang="en-US" sz="1400" dirty="0">
+                  <a:solidFill>
+                    <a:srgbClr val="0A0A0A"/>
+                  </a:solidFill>
+                  <a:latin typeface="Merriweather" pitchFamily="2" charset="77"/>
+                </a:rPr>
+                <a:t>(to lose)</a:t>
+              </a:r>
+            </a:p>
+          </p:txBody>
+        </p:sp>
+        <p:sp>
+          <p:nvSpPr>
+            <p:cNvPr id="7" name="Textfeld 6">
+              <a:extLst>
+                <a:ext uri="{FF2B5EF4-FFF2-40B4-BE49-F238E27FC236}">
+                  <a16:creationId xmlns:a16="http://schemas.microsoft.com/office/drawing/2014/main" id="{76FB47C4-6832-7B95-CC31-2016C1DF68A1}"/>
+                </a:ext>
+              </a:extLst>
+            </p:cNvPr>
+            <p:cNvSpPr txBox="1"/>
+            <p:nvPr/>
+          </p:nvSpPr>
+          <p:spPr>
+            <a:xfrm>
+              <a:off x="3719263" y="7299168"/>
+              <a:ext cx="2005677" cy="1027782"/>
+            </a:xfrm>
+            <a:prstGeom prst="rect">
+              <a:avLst/>
+            </a:prstGeom>
+            <a:noFill/>
+          </p:spPr>
+          <p:txBody>
+            <a:bodyPr wrap="none" rtlCol="0">
+              <a:spAutoFit/>
+            </a:bodyPr>
+            <a:lstStyle/>
+            <a:p>
+              <a:pPr algn="ctr">
+                <a:lnSpc>
+                  <a:spcPct val="150000"/>
+                </a:lnSpc>
+              </a:pPr>
+              <a:r>
+                <a:rPr lang="en-US" sz="1400" b="1" dirty="0">
+                  <a:solidFill>
+                    <a:srgbClr val="0A0A0A"/>
+                  </a:solidFill>
+                  <a:latin typeface="Merriweather" pitchFamily="2" charset="77"/>
+                </a:rPr>
+                <a:t>Unrelated distractor</a:t>
+              </a:r>
+            </a:p>
+            <a:p>
+              <a:pPr algn="ctr">
+                <a:lnSpc>
+                  <a:spcPct val="150000"/>
+                </a:lnSpc>
+              </a:pPr>
+              <a:r>
+                <a:rPr lang="en-US" sz="1400" dirty="0">
+                  <a:solidFill>
+                    <a:srgbClr val="0A0A0A"/>
+                  </a:solidFill>
+                  <a:latin typeface="Merriweather" pitchFamily="2" charset="77"/>
+                </a:rPr>
+                <a:t>”</a:t>
+              </a:r>
+              <a:r>
+                <a:rPr lang="en-US" sz="1400" dirty="0" err="1">
+                  <a:solidFill>
+                    <a:srgbClr val="0A0A0A"/>
+                  </a:solidFill>
+                  <a:latin typeface="Merriweather" pitchFamily="2" charset="77"/>
+                </a:rPr>
+                <a:t>anfassen</a:t>
+              </a:r>
+              <a:r>
+                <a:rPr lang="en-US" sz="1400" dirty="0">
+                  <a:solidFill>
+                    <a:srgbClr val="0A0A0A"/>
+                  </a:solidFill>
+                  <a:latin typeface="Merriweather" pitchFamily="2" charset="77"/>
+                </a:rPr>
+                <a:t>”</a:t>
+              </a:r>
+            </a:p>
+            <a:p>
+              <a:pPr algn="ctr">
+                <a:lnSpc>
+                  <a:spcPct val="150000"/>
+                </a:lnSpc>
+              </a:pPr>
+              <a:r>
+                <a:rPr lang="en-US" sz="1400" dirty="0">
+                  <a:solidFill>
+                    <a:srgbClr val="0A0A0A"/>
+                  </a:solidFill>
+                  <a:latin typeface="Merriweather" pitchFamily="2" charset="77"/>
+                </a:rPr>
+                <a:t>(to touch)</a:t>
+              </a:r>
+            </a:p>
+          </p:txBody>
+        </p:sp>
+        <p:sp>
+          <p:nvSpPr>
+            <p:cNvPr id="8" name="Textfeld 7">
+              <a:extLst>
+                <a:ext uri="{FF2B5EF4-FFF2-40B4-BE49-F238E27FC236}">
+                  <a16:creationId xmlns:a16="http://schemas.microsoft.com/office/drawing/2014/main" id="{DC19CD1A-7F3F-7E7A-2632-B84F29223322}"/>
+                </a:ext>
+              </a:extLst>
+            </p:cNvPr>
+            <p:cNvSpPr txBox="1"/>
+            <p:nvPr/>
+          </p:nvSpPr>
+          <p:spPr>
+            <a:xfrm>
+              <a:off x="6426243" y="7150499"/>
+              <a:ext cx="1960793" cy="1027782"/>
+            </a:xfrm>
+            <a:prstGeom prst="rect">
+              <a:avLst/>
+            </a:prstGeom>
+            <a:noFill/>
+          </p:spPr>
+          <p:txBody>
+            <a:bodyPr wrap="none" rtlCol="0">
+              <a:spAutoFit/>
+            </a:bodyPr>
+            <a:lstStyle/>
+            <a:p>
+              <a:pPr algn="ctr">
+                <a:lnSpc>
+                  <a:spcPct val="150000"/>
+                </a:lnSpc>
+              </a:pPr>
+              <a:r>
+                <a:rPr lang="en-US" sz="1400" b="1" dirty="0">
+                  <a:solidFill>
+                    <a:srgbClr val="0A0A0A"/>
+                  </a:solidFill>
+                  <a:latin typeface="Merriweather" pitchFamily="2" charset="77"/>
+                </a:rPr>
+                <a:t>Semantic distractor</a:t>
+              </a:r>
+            </a:p>
+            <a:p>
+              <a:pPr algn="ctr">
+                <a:lnSpc>
+                  <a:spcPct val="150000"/>
+                </a:lnSpc>
+              </a:pPr>
+              <a:r>
+                <a:rPr lang="en-US" sz="1400" dirty="0">
+                  <a:solidFill>
+                    <a:srgbClr val="0A0A0A"/>
+                  </a:solidFill>
+                  <a:latin typeface="Merriweather" pitchFamily="2" charset="77"/>
+                </a:rPr>
+                <a:t>”</a:t>
+              </a:r>
+              <a:r>
+                <a:rPr lang="en-US" sz="1400" dirty="0" err="1">
+                  <a:solidFill>
+                    <a:srgbClr val="0A0A0A"/>
+                  </a:solidFill>
+                  <a:latin typeface="Merriweather" pitchFamily="2" charset="77"/>
+                </a:rPr>
+                <a:t>werfen</a:t>
+              </a:r>
+              <a:r>
+                <a:rPr lang="en-US" sz="1400" dirty="0">
+                  <a:solidFill>
+                    <a:srgbClr val="0A0A0A"/>
+                  </a:solidFill>
+                  <a:latin typeface="Merriweather" pitchFamily="2" charset="77"/>
+                </a:rPr>
+                <a:t>”</a:t>
+              </a:r>
+            </a:p>
+            <a:p>
+              <a:pPr algn="ctr">
+                <a:lnSpc>
+                  <a:spcPct val="150000"/>
+                </a:lnSpc>
+              </a:pPr>
+              <a:r>
+                <a:rPr lang="en-US" sz="1400" dirty="0">
+                  <a:solidFill>
+                    <a:srgbClr val="0A0A0A"/>
+                  </a:solidFill>
+                  <a:latin typeface="Merriweather" pitchFamily="2" charset="77"/>
+                </a:rPr>
+                <a:t>(to throw)</a:t>
+              </a:r>
+            </a:p>
+          </p:txBody>
+        </p:sp>
+      </p:grpSp>
+    </p:spTree>
+    <p:extLst>
+      <p:ext uri="{BB962C8B-B14F-4D97-AF65-F5344CB8AC3E}">
+        <p14:creationId xmlns:p14="http://schemas.microsoft.com/office/powerpoint/2010/main" val="2525428995"/>
       </p:ext>
     </p:extLst>
   </p:cSld>
